--- a/poster/교원업적평가_접수안내_A3_시안B_길안내형.pptx
+++ b/poster/교원업적평가_접수안내_A3_시안B_길안내형.pptx
@@ -1231,7 +1231,7 @@
       </p:sp>
       <p:pic>
         <p:nvPicPr>
-          <p:cNvPr id="12" name="Image 2" descr="담당자 아이콘">    </p:cNvPr>
+          <p:cNvPr id="12" name="Image 2" descr="위치 아이콘">    </p:cNvPr>
           <p:cNvPicPr>
             <a:picLocks noChangeAspect="1"/>
           </p:cNvPicPr>
@@ -1289,7 +1289,7 @@
                 <a:ea typeface="맑은 고딕" pitchFamily="34" charset="-122"/>
                 <a:cs typeface="맑은 고딕" pitchFamily="34" charset="-120"/>
               </a:rPr>
-              <a:t>접수 담당자</a:t>
+              <a:t>산학협력단</a:t>
             </a:r>
             <a:endParaRPr lang="en-US" sz="4400" dirty="0"/>
           </a:p>
@@ -1309,7 +1309,7 @@
                 <a:ea typeface="맑은 고딕" pitchFamily="34" charset="-122"/>
                 <a:cs typeface="맑은 고딕" pitchFamily="34" charset="-120"/>
               </a:rPr>
-              <a:t>이중영, 이어진</a:t>
+              <a:t>본부동 916호</a:t>
             </a:r>
             <a:endParaRPr lang="en-US" sz="4400" dirty="0"/>
           </a:p>
